--- a/reports/Agentic-Robotics-赛题汇报.pptx
+++ b/reports/Agentic-Robotics-赛题汇报.pptx
@@ -3254,7 +3254,7 @@
                 </a:solidFill>
                 <a:latin typeface="Microsoft YaHei"/>
               </a:rPr>
-              <a:t>主任务：分拣（10 任务 × 10 初始状态 = 100 episodes，100/100）</a:t>
+              <a:t>主任务：分拣（10 任务 × 10 初始状态 = 100 episodes，98/100）</a:t>
             </a:r>
           </a:p>
           <a:p>
@@ -3309,7 +3309,7 @@
                 </a:solidFill>
                 <a:latin typeface="Microsoft YaHei"/>
               </a:rPr>
-              <a:t>2026-10-18</a:t>
+              <a:t>2026-10-25</a:t>
             </a:r>
           </a:p>
         </p:txBody>
@@ -3409,7 +3409,7 @@
                 </a:solidFill>
                 <a:latin typeface="Microsoft YaHei"/>
               </a:rPr>
-              <a:t>可复现性（初赛硬性要求）</a:t>
+              <a:t>可复现性（官方要求）</a:t>
             </a:r>
           </a:p>
         </p:txBody>
@@ -4128,7 +4128,7 @@
                 </a:solidFill>
                 <a:latin typeface="Microsoft YaHei"/>
               </a:rPr>
-              <a:t>加分 a 虚实迁移（SO-101 真机）—— 3–5 天且风险最高，本轮不排；加分 c 只做了「换数量/布局」，没做跨任务类型（码垛）</a:t>
+              <a:t>加分 a 虚实迁移（SO-101 真机）—— 3–5 天且风险最高，本轮不排</a:t>
             </a:r>
           </a:p>
           <a:p>
@@ -4156,7 +4156,7 @@
                 </a:solidFill>
                 <a:latin typeface="Microsoft YaHei"/>
               </a:rPr>
-              <a:t>变体 71.8%：</a:t>
+              <a:t>变体 95.5%：</a:t>
             </a:r>
             <a:r>
               <a:rPr sz="1280">
@@ -4165,7 +4165,7 @@
                 </a:solidFill>
                 <a:latin typeface="Microsoft YaHei"/>
               </a:rPr>
-              <a:t>失败全部含抓取失败，集中在小螺栓的第 2 件及以后；根因是残留姿态 + 邻件遮挡下预抓取位姿触关节限位</a:t>
+              <a:t>剩余 5 例 = 3 例初始布局不可行（环境可行性）+ 2 例远端边缘抓取后的搬运预算；抓取阶段已不再丢分</a:t>
             </a:r>
           </a:p>
           <a:p>
@@ -4202,7 +4202,7 @@
                 </a:solidFill>
                 <a:latin typeface="Microsoft YaHei"/>
               </a:rPr>
-              <a:t>小螺栓 13 mm 柄夹持偶有滑脱；蓝盒内腔底面被近侧盒壁遮挡，释放点估计偏高 12 mm</a:t>
+              <a:t>两次失败：小螺栓柄 xy 偏 5–7 mm 空夹；蓝盒内腔底面被近侧盒壁遮挡，释放高度偏高 12 mm</a:t>
             </a:r>
           </a:p>
           <a:p>
@@ -4239,7 +4239,7 @@
                 </a:solidFill>
                 <a:latin typeface="Microsoft YaHei"/>
               </a:rPr>
-              <a:t>r1 根因判断正确、配对子集 97%→100% 被采纳，但全量复测 98%（未泛化）→ 单列为风险，主口径不用它</a:t>
+              <a:t>r1 根因判断正确、配对子集 97%→100% 被采纳，但全量复测 98.0%（未泛化）→ 单列为风险，主口径不用它</a:t>
             </a:r>
           </a:p>
           <a:p>
@@ -4452,7 +4452,7 @@
                 </a:solidFill>
                 <a:latin typeface="Microsoft YaHei"/>
               </a:rPr>
-              <a:t>新文件夹：桌面 / Agentic-Robotics-提交包-20261018</a:t>
+              <a:t>提交包：桌面 / 提交包-20261023（PDF + 代码 + 视频）</a:t>
             </a:r>
           </a:p>
         </p:txBody>
@@ -4493,7 +4493,7 @@
                           </a:solidFill>
                           <a:latin typeface="Microsoft YaHei"/>
                         </a:rPr>
-                        <a:t>目录</a:t>
+                        <a:t>内容</a:t>
                       </a:r>
                     </a:p>
                   </a:txBody>
@@ -4516,7 +4516,7 @@
                           </a:solidFill>
                           <a:latin typeface="Microsoft YaHei"/>
                         </a:rPr>
-                        <a:t>内容</a:t>
+                        <a:t>说明</a:t>
                       </a:r>
                     </a:p>
                   </a:txBody>
@@ -4541,7 +4541,7 @@
                           </a:solidFill>
                           <a:latin typeface="Microsoft YaHei"/>
                         </a:rPr>
-                        <a:t>01_repo</a:t>
+                        <a:t>01_技术文档.pdf</a:t>
                       </a:r>
                     </a:p>
                   </a:txBody>
@@ -4564,7 +4564,7 @@
                           </a:solidFill>
                           <a:latin typeface="Microsoft YaHei"/>
                         </a:rPr>
-                        <a:t>git bundle + push 说明（含 6 个 tag）</a:t>
+                        <a:t>15 页总结报告（本 PPT 同源）</a:t>
                       </a:r>
                     </a:p>
                   </a:txBody>
@@ -4589,7 +4589,7 @@
                           </a:solidFill>
                           <a:latin typeface="Microsoft YaHei"/>
                         </a:rPr>
-                        <a:t>02_zip</a:t>
+                        <a:t>02_代码/</a:t>
                       </a:r>
                     </a:p>
                   </a:txBody>
@@ -4612,7 +4612,7 @@
                           </a:solidFill>
                           <a:latin typeface="Microsoft YaHei"/>
                         </a:rPr>
-                        <a:t>源码包 + 关键运行包</a:t>
+                        <a:t>git archive HEAD + 关键 runs（metrics/trace/plan）</a:t>
                       </a:r>
                     </a:p>
                   </a:txBody>
@@ -4637,7 +4637,7 @@
                           </a:solidFill>
                           <a:latin typeface="Microsoft YaHei"/>
                         </a:rPr>
-                        <a:t>03_video</a:t>
+                        <a:t>03_视频链接.txt</a:t>
                       </a:r>
                     </a:p>
                   </a:txBody>
@@ -4660,7 +4660,7 @@
                           </a:solidFill>
                           <a:latin typeface="Microsoft YaHei"/>
                         </a:rPr>
-                        <a:t>演示片 69 s + 10 条原始 episode</a:t>
+                        <a:t>网盘链接与提取码（待填）</a:t>
                       </a:r>
                     </a:p>
                   </a:txBody>
@@ -4685,7 +4685,7 @@
                           </a:solidFill>
                           <a:latin typeface="Microsoft YaHei"/>
                         </a:rPr>
-                        <a:t>04_ppt</a:t>
+                        <a:t>演示成片</a:t>
                       </a:r>
                     </a:p>
                   </a:txBody>
@@ -4708,7 +4708,7 @@
                           </a:solidFill>
                           <a:latin typeface="Microsoft YaHei"/>
                         </a:rPr>
-                        <a:t>本 PPT</a:t>
+                        <a:t>AG-VLA-demo-720p.mp4，4′39″ / 1280×720</a:t>
                       </a:r>
                     </a:p>
                   </a:txBody>
@@ -4733,7 +4733,7 @@
                           </a:solidFill>
                           <a:latin typeface="Microsoft YaHei"/>
                         </a:rPr>
-                        <a:t>05_report</a:t>
+                        <a:t>仓库</a:t>
                       </a:r>
                     </a:p>
                   </a:txBody>
@@ -4756,7 +4756,7 @@
                           </a:solidFill>
                           <a:latin typeface="Microsoft YaHei"/>
                         </a:rPr>
-                        <a:t>PDF 报告（5 页）+ RESULT_SUMMARY + STATUS</a:t>
+                        <a:t>github.com/JamesWei216/agentic-robotics（public）</a:t>
                       </a:r>
                     </a:p>
                   </a:txBody>
@@ -4780,7 +4780,7 @@
         <p:spPr>
           <a:xfrm>
             <a:off x="6583680" y="1463040"/>
-            <a:ext cx="5120640" cy="4206240"/>
+            <a:ext cx="5120640" cy="4389120"/>
           </a:xfrm>
           <a:prstGeom prst="rect">
             <a:avLst/>
@@ -4802,7 +4802,7 @@
               </a:spcAft>
             </a:pPr>
             <a:r>
-              <a:rPr sz="1350">
+              <a:rPr sz="1250">
                 <a:solidFill>
                   <a:srgbClr val="14355F"/>
                 </a:solidFill>
@@ -4811,22 +4811,22 @@
               <a:t>· </a:t>
             </a:r>
             <a:r>
-              <a:rPr sz="1350" b="1">
+              <a:rPr sz="1250" b="1">
                 <a:solidFill>
                   <a:srgbClr val="14355F"/>
                 </a:solidFill>
                 <a:latin typeface="Microsoft YaHei"/>
               </a:rPr>
-              <a:t>下一步 1：</a:t>
-            </a:r>
-            <a:r>
-              <a:rPr sz="1230">
+              <a:t>已完成：</a:t>
+            </a:r>
+            <a:r>
+              <a:rPr sz="1130">
                 <a:solidFill>
                   <a:srgbClr val="5B6470"/>
                 </a:solidFill>
                 <a:latin typeface="Microsoft YaHei"/>
               </a:rPr>
-              <a:t>变体套件分层子目标编排（目标 75%+）</a:t>
+              <a:t>P1-2 变体套件 71.8% → 95.5%（A22 料盒被拖走；释放高度按内腔宽度分档）</a:t>
             </a:r>
           </a:p>
           <a:p>
@@ -4839,7 +4839,7 @@
               </a:spcAft>
             </a:pPr>
             <a:r>
-              <a:rPr sz="1350">
+              <a:rPr sz="1250">
                 <a:solidFill>
                   <a:srgbClr val="14355F"/>
                 </a:solidFill>
@@ -4848,22 +4848,22 @@
               <a:t>· </a:t>
             </a:r>
             <a:r>
-              <a:rPr sz="1350" b="1">
+              <a:rPr sz="1250" b="1">
                 <a:solidFill>
                   <a:srgbClr val="14355F"/>
                 </a:solidFill>
                 <a:latin typeface="Microsoft YaHei"/>
               </a:rPr>
-              <a:t>下一步 2：</a:t>
-            </a:r>
-            <a:r>
-              <a:rPr sz="1230">
+              <a:t>已完成：</a:t>
+            </a:r>
+            <a:r>
+              <a:rPr sz="1130">
                 <a:solidFill>
                   <a:srgbClr val="5B6470"/>
                 </a:solidFill>
                 <a:latin typeface="Microsoft YaHei"/>
               </a:rPr>
-              <a:t>视觉模式小件夹持闭环（目标 95%）</a:t>
+              <a:t>P1-3 报告定稿（15 页：失败案例章 / 自动修复 A/B / 评测协议声明 / 工位物料 / 33 条任务清单）</a:t>
             </a:r>
           </a:p>
           <a:p>
@@ -4876,7 +4876,7 @@
               </a:spcAft>
             </a:pPr>
             <a:r>
-              <a:rPr sz="1350">
+              <a:rPr sz="1250">
                 <a:solidFill>
                   <a:srgbClr val="14355F"/>
                 </a:solidFill>
@@ -4885,22 +4885,22 @@
               <a:t>· </a:t>
             </a:r>
             <a:r>
-              <a:rPr sz="1350" b="1">
+              <a:rPr sz="1250" b="1">
                 <a:solidFill>
                   <a:srgbClr val="14355F"/>
                 </a:solidFill>
                 <a:latin typeface="Microsoft YaHei"/>
               </a:rPr>
-              <a:t>下一步 3：</a:t>
-            </a:r>
-            <a:r>
-              <a:rPr sz="1230">
+              <a:t>剩余 1：</a:t>
+            </a:r>
+            <a:r>
+              <a:rPr sz="1130">
                 <a:solidFill>
                   <a:srgbClr val="5B6470"/>
                 </a:solidFill>
                 <a:latin typeface="Microsoft YaHei"/>
               </a:rPr>
-              <a:t>如果要真机加分：SO-101 零样本入口 + 同模块视觉</a:t>
+              <a:t>视频链接（唯一硬阻塞）→ 写入 config/video_link.txt 后重跑 make_submission.sh</a:t>
             </a:r>
           </a:p>
           <a:p>
@@ -4913,7 +4913,7 @@
               </a:spcAft>
             </a:pPr>
             <a:r>
-              <a:rPr sz="1350">
+              <a:rPr sz="1250">
                 <a:solidFill>
                   <a:srgbClr val="14355F"/>
                 </a:solidFill>
@@ -4922,22 +4922,59 @@
               <a:t>· </a:t>
             </a:r>
             <a:r>
-              <a:rPr sz="1350" b="1">
+              <a:rPr sz="1250" b="1">
                 <a:solidFill>
                   <a:srgbClr val="14355F"/>
                 </a:solidFill>
                 <a:latin typeface="Microsoft YaHei"/>
               </a:rPr>
+              <a:t>剩余 2：</a:t>
+            </a:r>
+            <a:r>
+              <a:rPr sz="1130">
+                <a:solidFill>
+                  <a:srgbClr val="5B6470"/>
+                </a:solidFill>
+                <a:latin typeface="Microsoft YaHei"/>
+              </a:rPr>
+              <a:t>演示视频里的数字卡片仍待同步（本轮 PPT 已同步）</a:t>
+            </a:r>
+          </a:p>
+          <a:p>
+            <a:pPr>
+              <a:lnSpc>
+                <a:spcPct val="130000"/>
+              </a:lnSpc>
+              <a:spcAft>
+                <a:spcPts val="600"/>
+              </a:spcAft>
+            </a:pPr>
+            <a:r>
+              <a:rPr sz="1250">
+                <a:solidFill>
+                  <a:srgbClr val="14355F"/>
+                </a:solidFill>
+                <a:latin typeface="Microsoft YaHei"/>
+              </a:rPr>
+              <a:t>· </a:t>
+            </a:r>
+            <a:r>
+              <a:rPr sz="1250" b="1">
+                <a:solidFill>
+                  <a:srgbClr val="14355F"/>
+                </a:solidFill>
+                <a:latin typeface="Microsoft YaHei"/>
+              </a:rPr>
               <a:t>提交前需确认：</a:t>
             </a:r>
             <a:r>
-              <a:rPr sz="1230">
+              <a:rPr sz="1130">
                 <a:solidFill>
                   <a:srgbClr val="5B6470"/>
                 </a:solidFill>
                 <a:latin typeface="Microsoft YaHei"/>
               </a:rPr>
-              <a:t>官方是否有《任务说明书》与最低指标数值；repo 远端地址</a:t>
+              <a:t>官方《任务说明书》与最低指标数值</a:t>
             </a:r>
           </a:p>
         </p:txBody>
@@ -5160,7 +5197,7 @@
                 </a:solidFill>
                 <a:latin typeface="Microsoft YaHei"/>
               </a:rPr>
-              <a:t>100%</a:t>
+              <a:t>98.0%</a:t>
             </a:r>
           </a:p>
         </p:txBody>
@@ -5238,7 +5275,7 @@
                 </a:solidFill>
                 <a:latin typeface="Microsoft YaHei"/>
               </a:rPr>
-              <a:t>100/100 episodes</a:t>
+              <a:t>98/100 episodes</a:t>
             </a:r>
           </a:p>
         </p:txBody>
@@ -5318,11 +5355,11 @@
             <a:r>
               <a:rPr sz="3000" b="1">
                 <a:solidFill>
-                  <a:srgbClr val="B9770E"/>
-                </a:solidFill>
-                <a:latin typeface="Microsoft YaHei"/>
-              </a:rPr>
-              <a:t>71.8%</a:t>
+                  <a:srgbClr val="238636"/>
+                </a:solidFill>
+                <a:latin typeface="Microsoft YaHei"/>
+              </a:rPr>
+              <a:t>95.5%</a:t>
             </a:r>
           </a:p>
         </p:txBody>
@@ -5400,7 +5437,7 @@
                 </a:solidFill>
                 <a:latin typeface="Microsoft YaHei"/>
               </a:rPr>
-              <a:t>79/110 episodes</a:t>
+              <a:t>105/110 episodes</a:t>
             </a:r>
           </a:p>
         </p:txBody>
@@ -5484,7 +5521,7 @@
                 </a:solidFill>
                 <a:latin typeface="Microsoft YaHei"/>
               </a:rPr>
-              <a:t>90%</a:t>
+              <a:t>90.0%</a:t>
             </a:r>
           </a:p>
         </p:txBody>
@@ -5646,7 +5683,7 @@
                 </a:solidFill>
                 <a:latin typeface="Microsoft YaHei"/>
               </a:rPr>
-              <a:t>686</a:t>
+              <a:t>610</a:t>
             </a:r>
           </a:p>
         </p:txBody>
@@ -5724,7 +5761,7 @@
                 </a:solidFill>
                 <a:latin typeface="Microsoft YaHei"/>
               </a:rPr>
-              <a:t>34.3 s / episode</a:t>
+              <a:t>6.3 s / episode</a:t>
             </a:r>
           </a:p>
         </p:txBody>
@@ -5849,7 +5886,7 @@
                 </a:solidFill>
                 <a:latin typeface="Microsoft YaHei"/>
               </a:rPr>
-              <a:t>人机确认是硬门控：</a:t>
+              <a:t>人机确认（官方口径）：</a:t>
             </a:r>
             <a:r>
               <a:rPr sz="1380">
@@ -5858,7 +5895,7 @@
                 </a:solidFill>
                 <a:latin typeface="Microsoft YaHei"/>
               </a:rPr>
-              <a:t>auto / manual / deny 三模式，四条门控（解除使能 / 夹爪闭合 / 释放 / 长距离移动），网页面板带急停，全部写审计</a:t>
+              <a:t>赛题要求的是真机运动前确认；本作品做成常设机制：auto（仿真不阻断但写审计）/ manual（真机式阻塞）/ deny（回归测试），四条门控 + 网页面板急停</a:t>
             </a:r>
           </a:p>
           <a:p>
@@ -7018,7 +7055,7 @@
                 </a:solidFill>
                 <a:latin typeface="Microsoft YaHei"/>
               </a:rPr>
-              <a:t>100/100，平均 686 步 / 34.3 s，0 次超步、0 次 OOM</a:t>
+              <a:t>98/100 = 98.0%，平均 610 步 / 6.3 s</a:t>
             </a:r>
           </a:p>
         </p:txBody>
@@ -7484,7 +7521,7 @@
                           </a:solidFill>
                           <a:latin typeface="Microsoft YaHei"/>
                         </a:rPr>
-                        <a:t>10/10</a:t>
+                        <a:t>8/10</a:t>
                       </a:r>
                     </a:p>
                   </a:txBody>
@@ -7577,7 +7614,7 @@
         <p:spPr>
           <a:xfrm>
             <a:off x="502920" y="2514600"/>
-            <a:ext cx="5394960" cy="3291840"/>
+            <a:ext cx="5394960" cy="3566160"/>
           </a:xfrm>
           <a:prstGeom prst="rect">
             <a:avLst/>
@@ -7599,7 +7636,7 @@
               </a:spcAft>
             </a:pPr>
             <a:r>
-              <a:rPr sz="1350">
+              <a:rPr sz="1250">
                 <a:solidFill>
                   <a:srgbClr val="14355F"/>
                 </a:solidFill>
@@ -7608,22 +7645,22 @@
               <a:t>· </a:t>
             </a:r>
             <a:r>
-              <a:rPr sz="1350" b="1">
+              <a:rPr sz="1250" b="1">
                 <a:solidFill>
                   <a:srgbClr val="14355F"/>
                 </a:solidFill>
                 <a:latin typeface="Microsoft YaHei"/>
               </a:rPr>
-              <a:t>上一轮的瓶颈：</a:t>
-            </a:r>
-            <a:r>
-              <a:rPr sz="1230">
+              <a:t>成绩：</a:t>
+            </a:r>
+            <a:r>
+              <a:rPr sz="1130">
                 <a:solidFill>
                   <a:srgbClr val="5B6470"/>
                 </a:solidFill>
                 <a:latin typeface="Microsoft YaHei"/>
               </a:rPr>
-              <a:t>t6（大螺栓→红盒）只有 8–10/10，且平均 964 步 —— 搬运阶段被关节限位卡住</a:t>
+              <a:t>9 个任务 10/10；剩余失分 = t6 8/10：螺栓落在 x ≈ +0.174 m，越过 A17 的「舒适带」后搬运烧完预算</a:t>
             </a:r>
           </a:p>
           <a:p>
@@ -7636,7 +7673,7 @@
               </a:spcAft>
             </a:pPr>
             <a:r>
-              <a:rPr sz="1350">
+              <a:rPr sz="1250">
                 <a:solidFill>
                   <a:srgbClr val="14355F"/>
                 </a:solidFill>
@@ -7645,22 +7682,22 @@
               <a:t>· </a:t>
             </a:r>
             <a:r>
-              <a:rPr sz="1350" b="1">
+              <a:rPr sz="1250" b="1">
                 <a:solidFill>
                   <a:srgbClr val="14355F"/>
                 </a:solidFill>
                 <a:latin typeface="Microsoft YaHei"/>
               </a:rPr>
-              <a:t>根因两处：</a:t>
-            </a:r>
-            <a:r>
-              <a:rPr sz="1230">
+              <a:t>口径说明：</a:t>
+            </a:r>
+            <a:r>
+              <a:rPr sz="1130">
                 <a:solidFill>
                   <a:srgbClr val="5B6470"/>
                 </a:solidFill>
                 <a:latin typeface="Microsoft YaHei"/>
               </a:rPr>
-              <a:t>① 直线斜插把 elbow 顶到硬限位（j4 = −0.070）② 料盒被「区域语义」错散布到可达域外（A13）</a:t>
+              <a:t>10-18 的 100% 是在旧初始状态上测的；10-22 干净环境重装后重采了初始状态，当前状态集上 HEAD 代码的 t6 也是 8/10 —— 98% 是当前基线，不是回退</a:t>
             </a:r>
           </a:p>
           <a:p>
@@ -7673,7 +7710,7 @@
               </a:spcAft>
             </a:pPr>
             <a:r>
-              <a:rPr sz="1350">
+              <a:rPr sz="1250">
                 <a:solidFill>
                   <a:srgbClr val="14355F"/>
                 </a:solidFill>
@@ -7682,22 +7719,22 @@
               <a:t>· </a:t>
             </a:r>
             <a:r>
-              <a:rPr sz="1350" b="1">
+              <a:rPr sz="1250" b="1">
                 <a:solidFill>
                   <a:srgbClr val="14355F"/>
                 </a:solidFill>
                 <a:latin typeface="Microsoft YaHei"/>
               </a:rPr>
-              <a:t>修法：</a:t>
-            </a:r>
-            <a:r>
-              <a:rPr sz="1230">
+              <a:t>关键工程修复：</a:t>
+            </a:r>
+            <a:r>
+              <a:rPr sz="1130">
                 <a:solidFill>
                   <a:srgbClr val="5B6470"/>
                 </a:solidFill>
                 <a:latin typeface="Microsoft YaHei"/>
               </a:rPr>
-              <a:t>高弧线路线 + 失速早退；区域半长 = 物体半径 + 抖动；小件搬运降速</a:t>
+              <a:t>A6 高弧线路线 + 失速早退；A13 区域半长 = 半径 + 抖动；A22 释放高度按内腔宽度分档</a:t>
             </a:r>
           </a:p>
         </p:txBody>
@@ -7860,7 +7897,7 @@
                 </a:solidFill>
                 <a:latin typeface="Microsoft YaHei"/>
               </a:rPr>
-              <a:t>79/110 = 71.8%；大螺栓类任务 40/40 全清</a:t>
+              <a:t>105/110 = 95.5%（10-18 是 71.8%）；大螺栓类任务 40/40 全清</a:t>
             </a:r>
           </a:p>
         </p:txBody>
@@ -8235,7 +8272,7 @@
                           </a:solidFill>
                           <a:latin typeface="Microsoft YaHei"/>
                         </a:rPr>
-                        <a:t>6/10</a:t>
+                        <a:t>10/10</a:t>
                       </a:r>
                     </a:p>
                   </a:txBody>
@@ -8281,7 +8318,7 @@
                           </a:solidFill>
                           <a:latin typeface="Microsoft YaHei"/>
                         </a:rPr>
-                        <a:t>6/10</a:t>
+                        <a:t>10/10</a:t>
                       </a:r>
                     </a:p>
                   </a:txBody>
@@ -8327,7 +8364,7 @@
                           </a:solidFill>
                           <a:latin typeface="Microsoft YaHei"/>
                         </a:rPr>
-                        <a:t>2/10</a:t>
+                        <a:t>10/10</a:t>
                       </a:r>
                     </a:p>
                   </a:txBody>
@@ -8419,7 +8456,7 @@
                           </a:solidFill>
                           <a:latin typeface="Microsoft YaHei"/>
                         </a:rPr>
-                        <a:t>3/10</a:t>
+                        <a:t>8/10</a:t>
                       </a:r>
                     </a:p>
                   </a:txBody>
@@ -8442,7 +8479,7 @@
                           </a:solidFill>
                           <a:latin typeface="Microsoft YaHei"/>
                         </a:rPr>
-                        <a:t>4/10</a:t>
+                        <a:t>9/10</a:t>
                       </a:r>
                     </a:p>
                   </a:txBody>
@@ -8466,7 +8503,7 @@
         <p:spPr>
           <a:xfrm>
             <a:off x="502920" y="2651760"/>
-            <a:ext cx="5852160" cy="3474720"/>
+            <a:ext cx="5852160" cy="3657600"/>
           </a:xfrm>
           <a:prstGeom prst="rect">
             <a:avLst/>
@@ -8488,7 +8525,7 @@
               </a:spcAft>
             </a:pPr>
             <a:r>
-              <a:rPr sz="1350">
+              <a:rPr sz="1250">
                 <a:solidFill>
                   <a:srgbClr val="14355F"/>
                 </a:solidFill>
@@ -8497,7 +8534,7 @@
               <a:t>· </a:t>
             </a:r>
             <a:r>
-              <a:rPr sz="1350" b="1">
+              <a:rPr sz="1250" b="1">
                 <a:solidFill>
                   <a:srgbClr val="14355F"/>
                 </a:solidFill>
@@ -8506,7 +8543,7 @@
               <a:t>换任务的改动成本：</a:t>
             </a:r>
             <a:r>
-              <a:rPr sz="1230">
+              <a:rPr sz="1130">
                 <a:solidFill>
                   <a:srgbClr val="5B6470"/>
                 </a:solidFill>
@@ -8525,7 +8562,7 @@
               </a:spcAft>
             </a:pPr>
             <a:r>
-              <a:rPr sz="1350">
+              <a:rPr sz="1250">
                 <a:solidFill>
                   <a:srgbClr val="14355F"/>
                 </a:solidFill>
@@ -8534,22 +8571,22 @@
               <a:t>· </a:t>
             </a:r>
             <a:r>
-              <a:rPr sz="1350" b="1">
+              <a:rPr sz="1250" b="1">
                 <a:solidFill>
                   <a:srgbClr val="14355F"/>
                 </a:solidFill>
                 <a:latin typeface="Microsoft YaHei"/>
               </a:rPr>
-              <a:t>瓶颈：</a:t>
-            </a:r>
-            <a:r>
-              <a:rPr sz="1230">
+              <a:t>71.8% → 95.5% 的真根因（A22）：</a:t>
+            </a:r>
+            <a:r>
+              <a:rPr sz="1130">
                 <a:solidFill>
                   <a:srgbClr val="5B6470"/>
                 </a:solidFill>
                 <a:latin typeface="Microsoft YaHei"/>
               </a:rPr>
-              <a:t>28 例失败里 28 例含抓取失败、24 例预算耗尽，集中在小螺栓（13 mm 柄）的第 2 件及以后</a:t>
+              <a:t>第 1 件放完后蓝盒被张开的指头「挂住」拖到第 2 件的位置，第 2 件撞在盒上；日志却写「抓取失败」——接触对过滤漏了 gripper0_* 差点把结论带偏</a:t>
             </a:r>
           </a:p>
           <a:p>
@@ -8562,7 +8599,7 @@
               </a:spcAft>
             </a:pPr>
             <a:r>
-              <a:rPr sz="1350">
+              <a:rPr sz="1250">
                 <a:solidFill>
                   <a:srgbClr val="14355F"/>
                 </a:solidFill>
@@ -8571,22 +8608,22 @@
               <a:t>· </a:t>
             </a:r>
             <a:r>
-              <a:rPr sz="1350" b="1">
+              <a:rPr sz="1250" b="1">
                 <a:solidFill>
                   <a:srgbClr val="14355F"/>
                 </a:solidFill>
                 <a:latin typeface="Microsoft YaHei"/>
               </a:rPr>
-              <a:t>已做：</a:t>
-            </a:r>
-            <a:r>
-              <a:rPr sz="1230">
+              <a:t>修法：</a:t>
+            </a:r>
+            <a:r>
+              <a:rPr sz="1130">
                 <a:solidFill>
                   <a:srgbClr val="5B6470"/>
                 </a:solidFill>
                 <a:latin typeface="Microsoft YaHei"/>
               </a:rPr>
-              <a:t>释放后先 home 再接近、失败重抓一次（带预算守门）、小件降速、区域语义修正</a:t>
+              <a:t>释放高度按内腔宽度分档（窄盒盒口 +35 mm + 慢速直上，宽盒维持低释放 A23）；弧线爬升封顶 1.30 m（A24）</a:t>
             </a:r>
           </a:p>
           <a:p>
@@ -8599,7 +8636,7 @@
               </a:spcAft>
             </a:pPr>
             <a:r>
-              <a:rPr sz="1350">
+              <a:rPr sz="1250">
                 <a:solidFill>
                   <a:srgbClr val="14355F"/>
                 </a:solidFill>
@@ -8608,22 +8645,22 @@
               <a:t>· </a:t>
             </a:r>
             <a:r>
-              <a:rPr sz="1350" b="1">
+              <a:rPr sz="1250" b="1">
                 <a:solidFill>
                   <a:srgbClr val="14355F"/>
                 </a:solidFill>
                 <a:latin typeface="Microsoft YaHei"/>
               </a:rPr>
-              <a:t>下一步：</a:t>
-            </a:r>
-            <a:r>
-              <a:rPr sz="1230">
+              <a:t>剩余 5 例：</a:t>
+            </a:r>
+            <a:r>
+              <a:rPr sz="1130">
                 <a:solidFill>
                   <a:srgbClr val="5B6470"/>
                 </a:solidFill>
                 <a:latin typeface="Microsoft YaHei"/>
               </a:rPr>
-              <a:t>分层子目标编排（一件一闭环 + 回安全位），而不是一个脚本顺序跑四件</a:t>
+              <a:t>3 例初始布局不可行（RandomizationError）+ 2 例远端边缘抓取后的搬运预算</a:t>
             </a:r>
           </a:p>
         </p:txBody>
@@ -8786,7 +8823,7 @@
                 </a:solidFill>
                 <a:latin typeface="Microsoft YaHei"/>
               </a:rPr>
-              <a:t>AGENT_PERCEPTION=vision · 18/20 = 90%（离线核对 24/24 检出）</a:t>
+              <a:t>AGENT_PERCEPTION=vision · 18/20 = 90.0%（离线核对 24/24 检出）</a:t>
             </a:r>
           </a:p>
         </p:txBody>
@@ -9028,7 +9065,7 @@
                 </a:solidFill>
                 <a:latin typeface="Microsoft YaHei"/>
               </a:rPr>
-              <a:t>特权位姿（主口径）  100/100</a:t>
+              <a:t>特权位姿（主口径）  98/100（98.0%）</a:t>
             </a:r>
           </a:p>
           <a:p>
@@ -9044,7 +9081,7 @@
                 </a:solidFill>
                 <a:latin typeface="Microsoft YaHei"/>
               </a:rPr>
-              <a:t>视觉闭环（RGB-D）   18/20（90%）</a:t>
+              <a:t>视觉闭环（RGB-D）   18/20（90.0%）</a:t>
             </a:r>
           </a:p>
           <a:p>
@@ -9176,7 +9213,7 @@
                 </a:solidFill>
                 <a:latin typeface="Microsoft YaHei"/>
               </a:rPr>
-              <a:t>人机确认与安全（赛题硬性要求）</a:t>
+              <a:t>人机确认与安全（官方口径：约束真机；纯仿真 auto 不阻断）</a:t>
             </a:r>
           </a:p>
         </p:txBody>
@@ -9441,7 +9478,7 @@
                 </a:solidFill>
                 <a:latin typeface="Microsoft YaHei"/>
               </a:rPr>
-              <a:t>失败案例分析（docs/failures.md 共 16 例）</a:t>
+              <a:t>失败案例分析（docs/failures.md 共 35 例）</a:t>
             </a:r>
           </a:p>
         </p:txBody>
@@ -9664,7 +9701,7 @@
                           </a:solidFill>
                           <a:latin typeface="Microsoft YaHei"/>
                         </a:rPr>
-                        <a:t>A9</a:t>
+                        <a:t>A22</a:t>
                       </a:r>
                     </a:p>
                   </a:txBody>
@@ -9687,7 +9724,7 @@
                           </a:solidFill>
                           <a:latin typeface="Microsoft YaHei"/>
                         </a:rPr>
-                        <a:t>第 2 件抓取连续失手（两次 418 步后放弃）</a:t>
+                        <a:t>第 2 件总抓不到；日志写「空夹」</a:t>
                       </a:r>
                     </a:p>
                   </a:txBody>
@@ -9710,7 +9747,7 @@
                           </a:solidFill>
                           <a:latin typeface="Microsoft YaHei"/>
                         </a:rPr>
-                        <a:t>释放后停在料盒上方就接着抓 → pick 前先 home；t3 4/10 → 7/10</a:t>
+                        <a:t>真空手：放完第 1 件后料盒被指尖挂走 → 释放高度按内腔宽度分档；变体 71.8% → 95.5%</a:t>
                       </a:r>
                     </a:p>
                   </a:txBody>
@@ -9901,7 +9938,7 @@
                 </a:solidFill>
                 <a:latin typeface="Microsoft YaHei"/>
               </a:rPr>
-              <a:t>这四个 bug 有一个共同点：它们都不抛异常，只是让成功率随机抖动 —— 最容易被误判成「策略不行」。</a:t>
+              <a:t>这几个 bug 有一个共同点：都不抛异常，只让成功率随机抖动 —— 最容易被误判成「策略不行」。</a:t>
             </a:r>
           </a:p>
           <a:p>

--- a/reports/Agentic-Robotics-赛题汇报.pptx
+++ b/reports/Agentic-Robotics-赛题汇报.pptx
@@ -3309,7 +3309,7 @@
                 </a:solidFill>
                 <a:latin typeface="Microsoft YaHei"/>
               </a:rPr>
-              <a:t>2026-10-25</a:t>
+              <a:t>参赛者：魏凤辰 · 2026-10-27</a:t>
             </a:r>
           </a:p>
         </p:txBody>
@@ -4452,7 +4452,7 @@
                 </a:solidFill>
                 <a:latin typeface="Microsoft YaHei"/>
               </a:rPr>
-              <a:t>提交包：桌面 / 提交包-20261023（PDF + 代码 + 视频）</a:t>
+              <a:t>提交包：桌面 / 提交包-20261027（PDF + 代码 + 演示视频 + PPT，同一文件夹）</a:t>
             </a:r>
           </a:p>
         </p:txBody>
@@ -4467,7 +4467,7 @@
         </p:nvGraphicFramePr>
         <p:xfrm>
           <a:off x="502920" y="1417320"/>
-          <a:ext cx="5852160" cy="1645919"/>
+          <a:ext cx="5852160" cy="1371600"/>
         </p:xfrm>
         <a:graphic>
           <a:graphicData uri="http://schemas.openxmlformats.org/drawingml/2006/table">
@@ -4479,7 +4479,7 @@
                 <a:gridCol w="1371600"/>
                 <a:gridCol w="4480560"/>
               </a:tblGrid>
-              <a:tr h="274319">
+              <a:tr h="274320">
                 <a:tc>
                   <a:txBody>
                     <a:bodyPr/>
@@ -4527,7 +4527,7 @@
                   </a:tcPr>
                 </a:tc>
               </a:tr>
-              <a:tr h="274319">
+              <a:tr h="274320">
                 <a:tc>
                   <a:txBody>
                     <a:bodyPr/>
@@ -4575,7 +4575,7 @@
                   </a:tcPr>
                 </a:tc>
               </a:tr>
-              <a:tr h="274319">
+              <a:tr h="274320">
                 <a:tc>
                   <a:txBody>
                     <a:bodyPr/>
@@ -4623,7 +4623,7 @@
                   </a:tcPr>
                 </a:tc>
               </a:tr>
-              <a:tr h="274319">
+              <a:tr h="274320">
                 <a:tc>
                   <a:txBody>
                     <a:bodyPr/>
@@ -4637,7 +4637,7 @@
                           </a:solidFill>
                           <a:latin typeface="Microsoft YaHei"/>
                         </a:rPr>
-                        <a:t>03_视频链接.txt</a:t>
+                        <a:t>03_演示视频.mp4</a:t>
                       </a:r>
                     </a:p>
                   </a:txBody>
@@ -4660,7 +4660,7 @@
                           </a:solidFill>
                           <a:latin typeface="Microsoft YaHei"/>
                         </a:rPr>
-                        <a:t>网盘链接与提取码（待填）</a:t>
+                        <a:t>随包提供，4′41″ / 1280×720 / 25 fps</a:t>
                       </a:r>
                     </a:p>
                   </a:txBody>
@@ -4671,7 +4671,7 @@
                   </a:tcPr>
                 </a:tc>
               </a:tr>
-              <a:tr h="274319">
+              <a:tr h="274320">
                 <a:tc>
                   <a:txBody>
                     <a:bodyPr/>
@@ -4685,7 +4685,7 @@
                           </a:solidFill>
                           <a:latin typeface="Microsoft YaHei"/>
                         </a:rPr>
-                        <a:t>演示成片</a:t>
+                        <a:t>04_汇报PPT.pptx</a:t>
                       </a:r>
                     </a:p>
                   </a:txBody>
@@ -4708,7 +4708,7 @@
                           </a:solidFill>
                           <a:latin typeface="Microsoft YaHei"/>
                         </a:rPr>
-                        <a:t>AG-VLA-demo-720p.mp4，4′39″ / 1280×720</a:t>
+                        <a:t>本 PPT（12 页）</a:t>
                       </a:r>
                     </a:p>
                   </a:txBody>
@@ -4719,54 +4719,6 @@
                   </a:tcPr>
                 </a:tc>
               </a:tr>
-              <a:tr h="274324">
-                <a:tc>
-                  <a:txBody>
-                    <a:bodyPr/>
-                    <a:lstStyle/>
-                    <a:p>
-                      <a:pPr algn="l"/>
-                      <a:r>
-                        <a:rPr sz="1150" b="0">
-                          <a:solidFill>
-                            <a:srgbClr val="14355F"/>
-                          </a:solidFill>
-                          <a:latin typeface="Microsoft YaHei"/>
-                        </a:rPr>
-                        <a:t>仓库</a:t>
-                      </a:r>
-                    </a:p>
-                  </a:txBody>
-                  <a:tcPr marL="54864" marR="54864" marT="18288" marB="18288">
-                    <a:solidFill>
-                      <a:srgbClr val="FFFFFF"/>
-                    </a:solidFill>
-                  </a:tcPr>
-                </a:tc>
-                <a:tc>
-                  <a:txBody>
-                    <a:bodyPr/>
-                    <a:lstStyle/>
-                    <a:p>
-                      <a:pPr algn="ctr"/>
-                      <a:r>
-                        <a:rPr sz="1150" b="0">
-                          <a:solidFill>
-                            <a:srgbClr val="14355F"/>
-                          </a:solidFill>
-                          <a:latin typeface="Microsoft YaHei"/>
-                        </a:rPr>
-                        <a:t>github.com/JamesWei216/agentic-robotics（public）</a:t>
-                      </a:r>
-                    </a:p>
-                  </a:txBody>
-                  <a:tcPr marL="54864" marR="54864" marT="18288" marB="18288">
-                    <a:solidFill>
-                      <a:srgbClr val="FFFFFF"/>
-                    </a:solidFill>
-                  </a:tcPr>
-                </a:tc>
-              </a:tr>
             </a:tbl>
           </a:graphicData>
         </a:graphic>
@@ -4891,7 +4843,7 @@
                 </a:solidFill>
                 <a:latin typeface="Microsoft YaHei"/>
               </a:rPr>
-              <a:t>剩余 1：</a:t>
+              <a:t>已完成：</a:t>
             </a:r>
             <a:r>
               <a:rPr sz="1130">
@@ -4900,7 +4852,7 @@
                 </a:solidFill>
                 <a:latin typeface="Microsoft YaHei"/>
               </a:rPr>
-              <a:t>视频链接（唯一硬阻塞）→ 写入 config/video_link.txt 后重跑 make_submission.sh</a:t>
+              <a:t>交付物统一数字（PDF / PPT / 视频均从 metrics.json 读取）</a:t>
             </a:r>
           </a:p>
           <a:p>
@@ -4928,7 +4880,7 @@
                 </a:solidFill>
                 <a:latin typeface="Microsoft YaHei"/>
               </a:rPr>
-              <a:t>剩余 2：</a:t>
+              <a:t>约束：</a:t>
             </a:r>
             <a:r>
               <a:rPr sz="1130">
@@ -4937,7 +4889,7 @@
                 </a:solidFill>
                 <a:latin typeface="Microsoft YaHei"/>
               </a:rPr>
-              <a:t>演示视频里的数字卡片仍待同步（本轮 PPT 已同步）</a:t>
+              <a:t>材料只出现姓名，单位 / 联系方式一律不出现</a:t>
             </a:r>
           </a:p>
           <a:p>
